--- a/Cophylogenetic Reconciliation Presentation.pptx
+++ b/Cophylogenetic Reconciliation Presentation.pptx
@@ -9,6 +9,7 @@
     <p:sldId id="257" r:id="rId3"/>
     <p:sldId id="258" r:id="rId4"/>
     <p:sldId id="259" r:id="rId5"/>
+    <p:sldId id="261" r:id="rId6"/>
   </p:sldIdLst>
   <p:sldSz cx="12192000" cy="6858000"/>
   <p:notesSz cx="6858000" cy="9144000"/>
@@ -3507,21 +3508,14 @@
         </p:nvSpPr>
         <p:spPr>
           <a:xfrm>
-            <a:off x="838200" y="1825625"/>
-            <a:ext cx="6955971" cy="4351338"/>
+            <a:off x="453343" y="2964316"/>
+            <a:ext cx="5682343" cy="1603375"/>
           </a:xfrm>
         </p:spPr>
         <p:txBody>
           <a:bodyPr/>
           <a:lstStyle/>
           <a:p>
-            <a:pPr algn="l" rtl="0"/>
-            <a:r>
-              <a:rPr lang="en-US" dirty="0"/>
-              <a:t>The challenge - Reconstruct shared evolutionary past of host and parasite</a:t>
-            </a:r>
-          </a:p>
-          <a:p>
             <a:pPr lvl="1" algn="l" rtl="0"/>
             <a:r>
               <a:rPr lang="en-US" dirty="0"/>
@@ -3532,7 +3526,7 @@
             <a:pPr lvl="1" algn="l" rtl="0"/>
             <a:r>
               <a:rPr lang="en-US" dirty="0"/>
-              <a:t>So parasite jump to new hosts?</a:t>
+              <a:t>Do parasite jump to new hosts?</a:t>
             </a:r>
           </a:p>
           <a:p>
@@ -3545,6 +3539,42 @@
           <a:p>
             <a:pPr lvl="1" algn="l" rtl="0"/>
             <a:endParaRPr lang="en-IL" dirty="0"/>
+          </a:p>
+        </p:txBody>
+      </p:sp>
+      <p:sp>
+        <p:nvSpPr>
+          <p:cNvPr id="9" name="תיבת טקסט 8">
+            <a:extLst>
+              <a:ext uri="{FF2B5EF4-FFF2-40B4-BE49-F238E27FC236}">
+                <a16:creationId xmlns:a16="http://schemas.microsoft.com/office/drawing/2014/main" id="{7DA1EB51-43E2-FBF4-A6EA-2C3DEF09BB42}"/>
+              </a:ext>
+            </a:extLst>
+          </p:cNvPr>
+          <p:cNvSpPr txBox="1"/>
+          <p:nvPr/>
+        </p:nvSpPr>
+        <p:spPr>
+          <a:xfrm>
+            <a:off x="580116" y="1951890"/>
+            <a:ext cx="11111141" cy="830997"/>
+          </a:xfrm>
+          <a:prstGeom prst="rect">
+            <a:avLst/>
+          </a:prstGeom>
+          <a:noFill/>
+        </p:spPr>
+        <p:txBody>
+          <a:bodyPr wrap="square" rtlCol="0">
+            <a:spAutoFit/>
+          </a:bodyPr>
+          <a:lstStyle/>
+          <a:p>
+            <a:pPr algn="l" rtl="0"/>
+            <a:r>
+              <a:rPr lang="en-US" sz="2400" dirty="0"/>
+              <a:t>The challenge - Reconstruct shared evolutionary past of host and parasite from both host and parasite trees and current mapping.</a:t>
+            </a:r>
           </a:p>
         </p:txBody>
       </p:sp>
@@ -3850,7 +3880,7 @@
             <a:pPr algn="l" rtl="0"/>
             <a:r>
               <a:rPr lang="en-US" dirty="0"/>
-              <a:t>The computational model</a:t>
+              <a:t>DTL model</a:t>
             </a:r>
             <a:endParaRPr lang="en-IL" dirty="0"/>
           </a:p>
@@ -3874,17 +3904,40 @@
         </p:nvSpPr>
         <p:spPr/>
         <p:txBody>
-          <a:bodyPr/>
+          <a:bodyPr>
+            <a:normAutofit/>
+          </a:bodyPr>
           <a:lstStyle/>
           <a:p>
             <a:pPr marL="0" indent="0" algn="l" rtl="0">
               <a:buNone/>
             </a:pPr>
             <a:r>
-              <a:rPr lang="en-US" dirty="0"/>
-              <a:t>Dynamic Programming approach – calculates the cheapest evolutionary history by evaluating costs bottom-up</a:t>
-            </a:r>
-            <a:endParaRPr lang="en-IL" dirty="0"/>
+              <a:rPr lang="en-US" sz="2400" dirty="0"/>
+              <a:t>Dynamic programming model,</a:t>
+            </a:r>
+            <a:r>
+              <a:rPr lang="en-IL" dirty="0"/>
+              <a:t> </a:t>
+            </a:r>
+            <a:r>
+              <a:rPr lang="en-US" sz="2400" dirty="0"/>
+              <a:t>w</a:t>
+            </a:r>
+            <a:r>
+              <a:rPr lang="en-IL" sz="2400" dirty="0" err="1"/>
+              <a:t>alk</a:t>
+            </a:r>
+            <a:r>
+              <a:rPr lang="en-IL" sz="2400" dirty="0"/>
+              <a:t> the parasite tree bottom-up (children before parents)</a:t>
+            </a:r>
+          </a:p>
+          <a:p>
+            <a:pPr marL="0" indent="0" algn="l" rtl="0">
+              <a:buNone/>
+            </a:pPr>
+            <a:endParaRPr lang="en-IL" sz="2400" dirty="0"/>
           </a:p>
         </p:txBody>
       </p:sp>
@@ -3953,6 +4006,155 @@
     <p:extLst>
       <p:ext uri="{BB962C8B-B14F-4D97-AF65-F5344CB8AC3E}">
         <p14:creationId xmlns:p14="http://schemas.microsoft.com/office/powerpoint/2010/main" val="2654308468"/>
+      </p:ext>
+    </p:extLst>
+  </p:cSld>
+  <p:clrMapOvr>
+    <a:masterClrMapping/>
+  </p:clrMapOvr>
+</p:sld>
+</file>
+
+<file path=ppt/slides/slide5.xml><?xml version="1.0" encoding="utf-8"?>
+<p:sld xmlns:a="http://schemas.openxmlformats.org/drawingml/2006/main" xmlns:r="http://schemas.openxmlformats.org/officeDocument/2006/relationships" xmlns:p="http://schemas.openxmlformats.org/presentationml/2006/main">
+  <p:cSld>
+    <p:spTree>
+      <p:nvGrpSpPr>
+        <p:cNvPr id="1" name=""/>
+        <p:cNvGrpSpPr/>
+        <p:nvPr/>
+      </p:nvGrpSpPr>
+      <p:grpSpPr>
+        <a:xfrm>
+          <a:off x="0" y="0"/>
+          <a:ext cx="0" cy="0"/>
+          <a:chOff x="0" y="0"/>
+          <a:chExt cx="0" cy="0"/>
+        </a:xfrm>
+      </p:grpSpPr>
+      <p:pic>
+        <p:nvPicPr>
+          <p:cNvPr id="4" name="מציין מיקום תוכן 4">
+            <a:extLst>
+              <a:ext uri="{FF2B5EF4-FFF2-40B4-BE49-F238E27FC236}">
+                <a16:creationId xmlns:a16="http://schemas.microsoft.com/office/drawing/2014/main" id="{16E74FDF-11BA-0C2A-85F2-16A2575542D9}"/>
+              </a:ext>
+            </a:extLst>
+          </p:cNvPr>
+          <p:cNvPicPr>
+            <a:picLocks noChangeAspect="1"/>
+          </p:cNvPicPr>
+          <p:nvPr/>
+        </p:nvPicPr>
+        <p:blipFill>
+          <a:blip r:embed="rId2">
+            <a:extLst>
+              <a:ext uri="{28A0092B-C50C-407E-A947-70E740481C1C}">
+                <a14:useLocalDpi xmlns:a14="http://schemas.microsoft.com/office/drawing/2010/main" val="0"/>
+              </a:ext>
+            </a:extLst>
+          </a:blip>
+          <a:stretch>
+            <a:fillRect/>
+          </a:stretch>
+        </p:blipFill>
+        <p:spPr>
+          <a:xfrm>
+            <a:off x="5094514" y="1690688"/>
+            <a:ext cx="7097485" cy="4920343"/>
+          </a:xfrm>
+          <a:prstGeom prst="rect">
+            <a:avLst/>
+          </a:prstGeom>
+        </p:spPr>
+      </p:pic>
+      <p:sp>
+        <p:nvSpPr>
+          <p:cNvPr id="2" name="כותרת 1">
+            <a:extLst>
+              <a:ext uri="{FF2B5EF4-FFF2-40B4-BE49-F238E27FC236}">
+                <a16:creationId xmlns:a16="http://schemas.microsoft.com/office/drawing/2014/main" id="{5C09F1D0-B868-9951-E390-397F559E1301}"/>
+              </a:ext>
+            </a:extLst>
+          </p:cNvPr>
+          <p:cNvSpPr>
+            <a:spLocks noGrp="1"/>
+          </p:cNvSpPr>
+          <p:nvPr>
+            <p:ph type="title"/>
+          </p:nvPr>
+        </p:nvSpPr>
+        <p:spPr/>
+        <p:txBody>
+          <a:bodyPr/>
+          <a:lstStyle/>
+          <a:p>
+            <a:pPr algn="l" rtl="0"/>
+            <a:r>
+              <a:rPr lang="en-US" dirty="0"/>
+              <a:t>DTL Traceback Algorithm</a:t>
+            </a:r>
+            <a:endParaRPr lang="en-IL" dirty="0"/>
+          </a:p>
+        </p:txBody>
+      </p:sp>
+      <p:sp>
+        <p:nvSpPr>
+          <p:cNvPr id="3" name="מציין מיקום תוכן 2">
+            <a:extLst>
+              <a:ext uri="{FF2B5EF4-FFF2-40B4-BE49-F238E27FC236}">
+                <a16:creationId xmlns:a16="http://schemas.microsoft.com/office/drawing/2014/main" id="{EAC1D025-ABE3-4536-C4FE-6F026AEDE74D}"/>
+              </a:ext>
+            </a:extLst>
+          </p:cNvPr>
+          <p:cNvSpPr>
+            <a:spLocks noGrp="1"/>
+          </p:cNvSpPr>
+          <p:nvPr>
+            <p:ph idx="1"/>
+          </p:nvPr>
+        </p:nvSpPr>
+        <p:spPr>
+          <a:xfrm>
+            <a:off x="272144" y="1836511"/>
+            <a:ext cx="5704113" cy="4351338"/>
+          </a:xfrm>
+        </p:spPr>
+        <p:txBody>
+          <a:bodyPr>
+            <a:normAutofit/>
+          </a:bodyPr>
+          <a:lstStyle/>
+          <a:p>
+            <a:pPr marL="0" indent="0" algn="l" rtl="0">
+              <a:buNone/>
+            </a:pPr>
+            <a:r>
+              <a:rPr lang="en-US" dirty="0"/>
+              <a:t>Reconstructs specific evolutionary events at ancestral internal nodes.</a:t>
+            </a:r>
+          </a:p>
+          <a:p>
+            <a:pPr algn="l" rtl="0"/>
+            <a:r>
+              <a:rPr lang="en-US" sz="2400" dirty="0"/>
+              <a:t>The model infers a highly congruent history with only a single host-switch.</a:t>
+            </a:r>
+          </a:p>
+          <a:p>
+            <a:pPr algn="l" rtl="0"/>
+            <a:r>
+              <a:rPr lang="en-US" sz="2400" dirty="0"/>
+              <a:t>(Note: Losses occur along branches and do not form new splitting nodes)</a:t>
+            </a:r>
+            <a:endParaRPr lang="en-IL" sz="2400" dirty="0"/>
+          </a:p>
+        </p:txBody>
+      </p:sp>
+    </p:spTree>
+    <p:extLst>
+      <p:ext uri="{BB962C8B-B14F-4D97-AF65-F5344CB8AC3E}">
+        <p14:creationId xmlns:p14="http://schemas.microsoft.com/office/powerpoint/2010/main" val="1225329776"/>
       </p:ext>
     </p:extLst>
   </p:cSld>
